--- a/material/Actividad-04-El-caso-Estonia-DECK.pptx
+++ b/material/Actividad-04-El-caso-Estonia-DECK.pptx
@@ -613,7 +613,7 @@
           <a:p>
             <a:r>
               <a:rPr lang="en-US" dirty="0"/>
-              <a:t/>
+              <a:t>Unos 18 minutos. Presentar las seis tareas y marcar las tres NO-IA. Insistir en que las fuentes se abren y se miran; lo que no se abrió no se cita.</a:t>
             </a:r>
             <a:endParaRPr lang="en-US" dirty="0"/>
           </a:p>
@@ -1405,7 +1405,7 @@
           <a:p>
             <a:r>
               <a:rPr lang="en-US" dirty="0"/>
-              <a:t/>
+              <a:t>Unos 5 minutos. Formato de la exposición de la próxima sesión, rúbrica y reglas sobre IA. Resolver dudas de entrega antes de cerrar.</a:t>
             </a:r>
             <a:endParaRPr lang="en-US" dirty="0"/>
           </a:p>
@@ -1933,7 +1933,7 @@
           <a:p>
             <a:r>
               <a:rPr lang="en-US" dirty="0"/>
-              <a:t/>
+              <a:t>Leer la frase y cerrar. Recordar: la próxima sesión, cinco minutos por equipo, con las fuentes abiertas para responder preguntas. 1 minuto.</a:t>
             </a:r>
             <a:endParaRPr lang="en-US" dirty="0"/>
           </a:p>
@@ -2021,7 +2021,7 @@
           <a:p>
             <a:r>
               <a:rPr lang="en-US" dirty="0"/>
-              <a:t/>
+              <a:t>Unos 22 minutos. Presentar el caso sin revelar un veredicto: el objetivo es que examinen la afirmación, no que adopten la del docente.</a:t>
             </a:r>
             <a:endParaRPr lang="en-US" dirty="0"/>
           </a:p>
@@ -7403,7 +7403,7 @@
                 <a:ea typeface="Courier New" pitchFamily="34" charset="-122"/>
                 <a:cs typeface="Courier New" pitchFamily="34" charset="-120"/>
               </a:rPr>
-              <a:t>WAYBACK MACHINE · web.archive.org — el servicio de paginas archivadas de la fundacion Internet Archive</a:t>
+              <a:t>WAYBACK MACHINE · web.archive.org — el servicio de páginas archivadas de la fundación Internet Archive</a:t>
             </a:r>
             <a:endParaRPr lang="en-US" sz="1100" dirty="0"/>
           </a:p>
@@ -7683,14 +7683,63 @@
       </p:sp>
       <p:sp>
         <p:nvSpPr>
-          <p:cNvPr id="19" name="Text 16"/>
-          <p:cNvSpPr/>
-          <p:nvPr/>
-        </p:nvSpPr>
-        <p:spPr>
-          <a:xfrm>
-            <a:off x="8796528" y="3703320"/>
-            <a:ext cx="2743200" cy="868680"/>
+          <p:cNvPr id="19" name="Shape 16"/>
+          <p:cNvSpPr/>
+          <p:nvPr/>
+        </p:nvSpPr>
+        <p:spPr>
+          <a:xfrm>
+            <a:off x="8705088" y="4133088"/>
+            <a:ext cx="411480" cy="0"/>
+          </a:xfrm>
+          <a:prstGeom prst="line">
+            <a:avLst/>
+          </a:prstGeom>
+          <a:noFill/>
+          <a:ln w="31750">
+            <a:solidFill>
+              <a:srgbClr val="F07F06"/>
+            </a:solidFill>
+            <a:prstDash val="solid"/>
+            <a:tailEnd type="triangle"/>
+          </a:ln>
+        </p:spPr>
+      </p:sp>
+      <p:sp>
+        <p:nvSpPr>
+          <p:cNvPr id="20" name="Shape 17"/>
+          <p:cNvSpPr/>
+          <p:nvPr/>
+        </p:nvSpPr>
+        <p:spPr>
+          <a:xfrm>
+            <a:off x="9253728" y="3703320"/>
+            <a:ext cx="2368296" cy="868680"/>
+          </a:xfrm>
+          <a:prstGeom prst="rect">
+            <a:avLst/>
+          </a:prstGeom>
+          <a:solidFill>
+            <a:srgbClr val="F07F06"/>
+          </a:solidFill>
+          <a:ln w="22225">
+            <a:solidFill>
+              <a:srgbClr val="F07F06"/>
+            </a:solidFill>
+            <a:prstDash val="solid"/>
+          </a:ln>
+        </p:spPr>
+      </p:sp>
+      <p:sp>
+        <p:nvSpPr>
+          <p:cNvPr id="21" name="Text 18"/>
+          <p:cNvSpPr/>
+          <p:nvPr/>
+        </p:nvSpPr>
+        <p:spPr>
+          <a:xfrm>
+            <a:off x="9253728" y="3703320"/>
+            <a:ext cx="2368296" cy="566928"/>
           </a:xfrm>
           <a:prstGeom prst="rect">
             <a:avLst/>
@@ -7708,7 +7757,7 @@
             <a:r>
               <a:rPr lang="en-US" sz="1500" dirty="0">
                 <a:solidFill>
-                  <a:srgbClr val="F07F06"/>
+                  <a:srgbClr val="0F0F11"/>
                 </a:solidFill>
                 <a:latin typeface="Arial Black" pitchFamily="34" charset="0"/>
                 <a:ea typeface="Arial Black" pitchFamily="34" charset="-122"/>
@@ -7722,7 +7771,46 @@
       </p:sp>
       <p:sp>
         <p:nvSpPr>
-          <p:cNvPr id="20" name="Shape 17"/>
+          <p:cNvPr id="22" name="Text 19"/>
+          <p:cNvSpPr/>
+          <p:nvPr/>
+        </p:nvSpPr>
+        <p:spPr>
+          <a:xfrm>
+            <a:off x="9253728" y="4160520"/>
+            <a:ext cx="2368296" cy="274320"/>
+          </a:xfrm>
+          <a:prstGeom prst="rect">
+            <a:avLst/>
+          </a:prstGeom>
+          <a:noFill/>
+          <a:ln/>
+        </p:spPr>
+        <p:txBody>
+          <a:bodyPr wrap="square" lIns="0" tIns="0" rIns="0" bIns="0" rtlCol="0" anchor="ctr"/>
+          <a:lstStyle/>
+          <a:p>
+            <a:pPr algn="ctr" indent="0" marL="0">
+              <a:buNone/>
+            </a:pPr>
+            <a:r>
+              <a:rPr lang="en-US" sz="1000" dirty="0">
+                <a:solidFill>
+                  <a:srgbClr val="0F0F11"/>
+                </a:solidFill>
+                <a:latin typeface="Courier New" pitchFamily="34" charset="0"/>
+                <a:ea typeface="Courier New" pitchFamily="34" charset="-122"/>
+                <a:cs typeface="Courier New" pitchFamily="34" charset="-120"/>
+              </a:rPr>
+              <a:t>y por qué</a:t>
+            </a:r>
+            <a:endParaRPr lang="en-US" sz="1000" dirty="0"/>
+          </a:p>
+        </p:txBody>
+      </p:sp>
+      <p:sp>
+        <p:nvSpPr>
+          <p:cNvPr id="23" name="Shape 20"/>
           <p:cNvSpPr/>
           <p:nvPr/>
         </p:nvSpPr>
@@ -7754,7 +7842,7 @@
       </p:sp>
       <p:pic>
         <p:nvPicPr>
-          <p:cNvPr id="21" name="Image 1" descr="preencoded.png">    </p:cNvPr>
+          <p:cNvPr id="24" name="Image 1" descr="preencoded.png">    </p:cNvPr>
           <p:cNvPicPr>
             <a:picLocks noChangeAspect="1"/>
           </p:cNvPicPr>
@@ -7778,7 +7866,7 @@
       </p:pic>
       <p:sp>
         <p:nvSpPr>
-          <p:cNvPr id="22" name="Text 18"/>
+          <p:cNvPr id="25" name="Text 21"/>
           <p:cNvSpPr/>
           <p:nvPr/>
         </p:nvSpPr>
@@ -7817,7 +7905,7 @@
       </p:sp>
       <p:sp>
         <p:nvSpPr>
-          <p:cNvPr id="23" name="Text 19"/>
+          <p:cNvPr id="26" name="Text 22"/>
           <p:cNvSpPr/>
           <p:nvPr/>
         </p:nvSpPr>
@@ -23636,8 +23724,8 @@
         </p:nvSpPr>
         <p:spPr>
           <a:xfrm>
-            <a:off x="566928" y="3566160"/>
-            <a:ext cx="11057839" cy="457200"/>
+            <a:off x="566928" y="3493008"/>
+            <a:ext cx="11057839" cy="411480"/>
           </a:xfrm>
           <a:prstGeom prst="rect">
             <a:avLst/>
@@ -23678,8 +23766,8 @@
         </p:nvSpPr>
         <p:spPr>
           <a:xfrm>
-            <a:off x="566928" y="4114800"/>
-            <a:ext cx="11057839" cy="1371600"/>
+            <a:off x="566928" y="3977640"/>
+            <a:ext cx="11057839" cy="1280160"/>
           </a:xfrm>
           <a:prstGeom prst="rect">
             <a:avLst/>
@@ -23696,7 +23784,7 @@
                 <a:spcPct val="118000"/>
               </a:lnSpc>
               <a:spcAft>
-                <a:spcPts val="500"/>
+                <a:spcPts val="400"/>
               </a:spcAft>
               <a:buSzPct val="100000"/>
               <a:buChar char="■"/>
@@ -23720,7 +23808,7 @@
                 <a:spcPct val="118000"/>
               </a:lnSpc>
               <a:spcAft>
-                <a:spcPts val="500"/>
+                <a:spcPts val="400"/>
               </a:spcAft>
               <a:buSzPct val="100000"/>
               <a:buChar char="■"/>
@@ -23744,7 +23832,7 @@
                 <a:spcPct val="118000"/>
               </a:lnSpc>
               <a:spcAft>
-                <a:spcPts val="500"/>
+                <a:spcPts val="400"/>
               </a:spcAft>
               <a:buSzPct val="100000"/>
               <a:buChar char="■"/>
@@ -23768,7 +23856,7 @@
                 <a:spcPct val="118000"/>
               </a:lnSpc>
               <a:spcAft>
-                <a:spcPts val="500"/>
+                <a:spcPts val="400"/>
               </a:spcAft>
               <a:buSzPct val="100000"/>
               <a:buChar char="■"/>
@@ -23796,8 +23884,8 @@
         </p:nvSpPr>
         <p:spPr>
           <a:xfrm>
-            <a:off x="566928" y="5440680"/>
-            <a:ext cx="11057839" cy="822960"/>
+            <a:off x="566928" y="5349240"/>
+            <a:ext cx="11057839" cy="777240"/>
           </a:xfrm>
           <a:prstGeom prst="rect">
             <a:avLst/>
@@ -23836,7 +23924,7 @@
         </p:blipFill>
         <p:spPr>
           <a:xfrm>
-            <a:off x="804672" y="5660136"/>
+            <a:off x="804672" y="5568696"/>
             <a:ext cx="237744" cy="237744"/>
           </a:xfrm>
           <a:prstGeom prst="rect">
@@ -23852,7 +23940,7 @@
         </p:nvSpPr>
         <p:spPr>
           <a:xfrm>
-            <a:off x="1133856" y="5632704"/>
+            <a:off x="1133856" y="5541264"/>
             <a:ext cx="10234879" cy="292608"/>
           </a:xfrm>
           <a:prstGeom prst="rect">
@@ -23891,7 +23979,7 @@
         </p:nvSpPr>
         <p:spPr>
           <a:xfrm>
-            <a:off x="804672" y="5897880"/>
+            <a:off x="804672" y="5806440"/>
             <a:ext cx="10582351" cy="365760"/>
           </a:xfrm>
           <a:prstGeom prst="rect">
